--- a/dist/초6/사회·역사/현대사회와평화/초6_사회·역사_현대사회와평화_02_산업화와생활변화.pptx
+++ b/dist/초6/사회·역사/현대사회와평화/초6_사회·역사_현대사회와평화_02_산업화와생활변화.pptx
@@ -121,13 +121,13 @@
   <p:extLst>
     <p:ext uri="{521415D9-36F7-43E2-AB2F-B90AF26B5E84}">
       <p14:sectionLst xmlns:p14="http://schemas.microsoft.com/office/powerpoint/2010/main">
-        <p14:section name="도입" id="{86c037ae-0589-5336-5bf5-04d8501df972}">
+        <p14:section name="도입" id="{b301000b-779f-c1ef-a3d8-dcdc6f90d9a5}">
           <p14:sldIdLst>
             <p14:sldId id="256"/>
             <p14:sldId id="257"/>
           </p14:sldIdLst>
         </p14:section>
-        <p14:section name="개념" id="{cb98907a-0f37-0e1f-bed3-e42bf116046d}">
+        <p14:section name="개념" id="{dbc7d79c-499d-3ff7-b726-c67e40c148e4}">
           <p14:sldIdLst>
             <p14:sldId id="258"/>
             <p14:sldId id="259"/>
@@ -135,7 +135,7 @@
             <p14:sldId id="264"/>
           </p14:sldIdLst>
         </p14:section>
-        <p14:section name="연습" id="{0c044a31-7d14-99b9-f836-5f159bd90910}">
+        <p14:section name="연습" id="{abaa2685-144a-1d29-be14-eb19c886cab2}">
           <p14:sldIdLst>
             <p14:sldId id="260"/>
             <p14:sldId id="261"/>
@@ -144,30 +144,30 @@
             <p14:sldId id="266"/>
           </p14:sldIdLst>
         </p14:section>
-        <p14:section name="개념" id="{98e9d188-a197-a056-fca5-fe9556325081}">
+        <p14:section name="개념" id="{b8d8ad59-82ec-0814-4f12-08b5c50d48fa}">
           <p14:sldIdLst/>
         </p14:section>
-        <p14:section name="연습" id="{169b61da-784b-8da3-6044-e23715a3a4a5}">
+        <p14:section name="연습" id="{76716667-9194-a060-d670-4b74591ba30b}">
           <p14:sldIdLst/>
         </p14:section>
-        <p14:section name="개념" id="{8a56c95e-3840-8f5f-6f11-ee4aa89faf2b}">
+        <p14:section name="개념" id="{993de2aa-a8fb-6a88-b5d3-3fbe9fddc07e}">
           <p14:sldIdLst/>
         </p14:section>
-        <p14:section name="연습" id="{0d9cbce1-7caf-0a50-94c4-8ffc7d790467}">
+        <p14:section name="연습" id="{170a64cc-535c-1565-6736-a527b85be509}">
           <p14:sldIdLst/>
         </p14:section>
-        <p14:section name="확인" id="{def70da5-5431-9760-e1dc-697cad5f4d1a}">
+        <p14:section name="확인" id="{e30d4ea8-1342-f420-6f4c-24e5278df2dd}">
           <p14:sldIdLst>
             <p14:sldId id="267"/>
             <p14:sldId id="268"/>
           </p14:sldIdLst>
         </p14:section>
-        <p14:section name="정리" id="{03d28104-09c7-d567-19a7-ad294df2e0ff}">
+        <p14:section name="정리" id="{7fdeca7f-0cad-6cdf-84d2-ec69be43d4fe}">
           <p14:sldIdLst>
             <p14:sldId id="269"/>
           </p14:sldIdLst>
         </p14:section>
-        <p14:section name="보충" id="{c9a97385-3a2e-882a-bf89-c182cbefd869}">
+        <p14:section name="보충" id="{47b77253-5126-116d-b4ff-de4db3090004}">
           <p14:sldIdLst>
             <p14:sldId id="270"/>
           </p14:sldIdLst>
